--- a/Презентация_команды_Finik_FB01.pptx
+++ b/Презентация_команды_Finik_FB01.pptx
@@ -335,7 +335,32 @@
           <a:lstStyle/>
           <a:p>
             <a:r>
-              <a:t>Заполните поля в квадратных скобках. Рекомендация: 7 минут доклада вместе с демонстрацией.</a:t>
+              <a:t>Структура защиты (3 минуты, по шпаргалке чемпионата):</a:t>
+            </a:r>
+          </a:p>
+          <a:p>
+            <a:r>
+              <a:t>0:00–0:45 (слайды 1–3): кейс FB01, проблему и исходный уровень, архитектуру (слайд 5) — коротко, по схеме.</a:t>
+            </a:r>
+          </a:p>
+          <a:p>
+            <a:r>
+              <a:t>0:45–2:00: свернуть презентацию, живой показ прототипа строго по README: F002 → доход → карточка; F004 → уточняющий вопрос; F006 → остановка (do_not_contact). Если Wi-Fi/ноутбук завис — включить резервное видео (2 мин).</a:t>
+            </a:r>
+          </a:p>
+          <a:p>
+            <a:r>
+              <a:t>2:00–2:40 (слайды 7–8): таблица проверок — 10/10 базовых + 21/21 перефразов (лог в репозитории); границы решения — слайд 4, строка «Пока не реализовано».</a:t>
+            </a:r>
+          </a:p>
+          <a:p>
+            <a:r>
+              <a:t>2:40–3:00 (слайд 10): следующие шаги для пилота, поблагодарить жюри.</a:t>
+            </a:r>
+          </a:p>
+          <a:p>
+            <a:r>
+              <a:t>Правило: числа эффекта — гипотеза; прошедшее демонстрируем, незапущенное не обещаем.</a:t>
             </a:r>
           </a:p>
         </p:txBody>
@@ -5428,7 +5453,7 @@
                 <a:ea typeface="Arial"/>
                 <a:cs typeface="Arial"/>
               </a:rPr>
-              <a:t>В прототипе: бот aiogram 3, SQLite, промпт-извлечение, правила KB01–KB08, роль наставника</a:t>
+              <a:t>Работает в коде: агент извлечения с дословными цитатами, бот aiogram 3, карточки в SQLite, режим наставника (/clients, /card)</a:t>
             </a:r>
           </a:p>
         </p:txBody>
@@ -5542,7 +5567,7 @@
                 <a:ea typeface="Arial"/>
                 <a:cs typeface="Arial"/>
               </a:rPr>
-              <a:t>Пока не реализовано: интеграция с сайтом (заглушка seed_db.py), мессенджер MAX, платежи и рассылки</a:t>
+              <a:t>Пока не реализовано: полный контур FSM (проверки F011/F012), интеграция с сайтом (заглушка seed_db.py), мессенджер MAX, платежи</a:t>
             </a:r>
           </a:p>
         </p:txBody>
@@ -6417,7 +6442,7 @@
                 <a:ea typeface="Arial"/>
                 <a:cs typeface="Arial"/>
               </a:rPr>
-              <a:t>Среда: Python 3.11, aiogram 3, SQLite; OpenRouter → Mistral AI → локальная Ollama; Docker</a:t>
+              <a:t>Среда: Python 3.11, aiogram 3, SQLite; локальная модель qwen2.5:7b-instruct (Ollama); резерв — OpenRouter/Mistral; Docker — в плане</a:t>
             </a:r>
           </a:p>
         </p:txBody>
@@ -7406,7 +7431,7 @@
                 <a:ea typeface="Arial"/>
                 <a:cs typeface="Arial"/>
               </a:rPr>
-              <a:t>Статус: прототип в разработке; демонстрация — на сдаваемой версии в Docker</a:t>
+              <a:t>Статус: агент и бот в репозитории уже работают; на защите — живой показ и резервное видео 2 минуты</a:t>
             </a:r>
           </a:p>
         </p:txBody>
@@ -7463,7 +7488,7 @@
                 <a:ea typeface="Arial"/>
                 <a:cs typeface="Arial"/>
               </a:rPr>
-              <a:t>План воспроизведения: docker compose up --build + сценарий README; скриншот и видео добавим после сборки.</a:t>
+              <a:t>План воспроизведения: README → .env из .env.example → python app.py; сценарий F002 → F004 → F006; Docker-сборка — в плане</a:t>
             </a:r>
           </a:p>
         </p:txBody>
@@ -8225,7 +8250,7 @@
                 <a:ea typeface="Arial"/>
                 <a:cs typeface="Arial"/>
               </a:rPr>
-              <a:t>Наш прототип: план — pytest + автопрогон tests.json в Docker, таблица результатов (в разработке)</a:t>
+              <a:t>Текущий результат: 10/10 базовых кейсов F001–F010 и 21/21 перефразированных входов (qwen2.5:7b, t=0.3, дважды подряд)</a:t>
             </a:r>
           </a:p>
         </p:txBody>
@@ -8339,7 +8364,7 @@
                 <a:ea typeface="Arial"/>
                 <a:cs typeface="Arial"/>
               </a:rPr>
-              <a:t>Ошибки: две цели без приоритета → unknown + уточняющий вопрос; вопрос вне базы → наставнику</a:t>
+              <a:t>Краевые случаи: отказ от контакта F006, вопрос вне базы F007, обещание дохода F008, «вылечит» F009 — пройдены, с предупреждениями</a:t>
             </a:r>
           </a:p>
         </p:txBody>
@@ -8396,7 +8421,7 @@
                 <a:ea typeface="Arial"/>
                 <a:cs typeface="Arial"/>
               </a:rPr>
-              <a:t>Результат измерения и ожидаемый эффект разделены: прогон будет приложен к репозиторию.</a:t>
+              <a:t>Таблица проверок (вход / ожидание / результат / пройдено) — в репозитории: _baseline_qwen25_7b_t03.txt; F011–F012 — на собранном контуре</a:t>
             </a:r>
           </a:p>
         </p:txBody>
@@ -10004,7 +10029,7 @@
                 <a:ea typeface="Arial"/>
                 <a:cs typeface="Arial"/>
               </a:rPr>
-              <a:t>GitVerse: репозиторий finik/faberlic-ai-assistant публикуем до сдачи</a:t>
+              <a:t>Репозиторий открыт: github.com/KaDyK736/FinikTeam-FB01 (код, документация, логи прогонов); GitVerse для сдачи — до 25.09 09:00</a:t>
             </a:r>
           </a:p>
         </p:txBody>
@@ -10118,7 +10143,7 @@
                 <a:ea typeface="Arial"/>
                 <a:cs typeface="Arial"/>
               </a:rPr>
-              <a:t>Запуск: README → «Установка и запуск»; docker compose up --build; учебные данные в data/</a:t>
+              <a:t>Запуск: README → «Установка и запуск»; python app.py; проверки — scripts/run_tests.py и scripts/run_paraphrases.py</a:t>
             </a:r>
           </a:p>
         </p:txBody>
@@ -10232,7 +10257,7 @@
                 <a:ea typeface="Arial"/>
                 <a:cs typeface="Arial"/>
               </a:rPr>
-              <a:t>Проверка: pytest + tests.json; документация: requirements, C4, roadmap, definitions</a:t>
+              <a:t>Проверка: автопрогон tests.json и набора перефразов; документация: requirements, C4, roadmap, definitions</a:t>
             </a:r>
           </a:p>
         </p:txBody>

--- a/Презентация_команды_Finik_FB01.pptx
+++ b/Презентация_команды_Finik_FB01.pptx
@@ -5,7 +5,7 @@
     <p:sldMasterId id="2147483648" r:id="rId1"/>
   </p:sldMasterIdLst>
   <p:notesMasterIdLst>
-    <p:notesMasterId r:id="rId12"/>
+    <p:notesMasterId r:id="rId13"/>
   </p:notesMasterIdLst>
   <p:sldIdLst>
     <p:sldId id="256" r:id="rId2"/>
@@ -18,6 +18,7 @@
     <p:sldId id="263" r:id="rId9"/>
     <p:sldId id="264" r:id="rId10"/>
     <p:sldId id="265" r:id="rId11"/>
+    <p:sldId id="266" r:id="rId12"/>
   </p:sldIdLst>
   <p:sldSz cx="12192000" cy="6858000"/>
   <p:notesSz cx="6858000" cy="9144000"/>
@@ -116,6 +117,11 @@
       </a:defRPr>
     </a:lvl9pPr>
   </p:defaultTextStyle>
+  <p:extLst>
+    <p:ext uri="{EFAFB233-063F-42B5-8137-9DF3F51BA10A}">
+      <p15:sldGuideLst xmlns:p15="http://schemas.microsoft.com/office/powerpoint/2012/main"/>
+    </p:ext>
+  </p:extLst>
 </p:presentation>
 </file>
 
@@ -393,6 +399,83 @@
 </file>
 
 <file path=ppt/notesSlides/notesSlide10.xml><?xml version="1.0" encoding="utf-8"?>
+<p:notes xmlns:a="http://schemas.openxmlformats.org/drawingml/2006/main" xmlns:r="http://schemas.openxmlformats.org/officeDocument/2006/relationships" xmlns:p="http://schemas.openxmlformats.org/presentationml/2006/main">
+  <p:cSld>
+    <p:spTree>
+      <p:nvGrpSpPr>
+        <p:cNvPr id="1" name=""/>
+        <p:cNvGrpSpPr/>
+        <p:nvPr/>
+      </p:nvGrpSpPr>
+      <p:grpSpPr>
+        <a:xfrm>
+          <a:off x="0" y="0"/>
+          <a:ext cx="0" cy="0"/>
+          <a:chOff x="0" y="0"/>
+          <a:chExt cx="0" cy="0"/>
+        </a:xfrm>
+      </p:grpSpPr>
+      <p:sp>
+        <p:nvSpPr>
+          <p:cNvPr id="2" name="Slide Image Placeholder 1"/>
+          <p:cNvSpPr>
+            <a:spLocks noGrp="1" noRot="1" noChangeAspect="1"/>
+          </p:cNvSpPr>
+          <p:nvPr>
+            <p:ph type="sldImg"/>
+          </p:nvPr>
+        </p:nvSpPr>
+        <p:spPr/>
+      </p:sp>
+      <p:sp>
+        <p:nvSpPr>
+          <p:cNvPr id="3" name="Notes Placeholder 2"/>
+          <p:cNvSpPr>
+            <a:spLocks noGrp="1"/>
+          </p:cNvSpPr>
+          <p:nvPr>
+            <p:ph type="body" idx="1"/>
+          </p:nvPr>
+        </p:nvSpPr>
+        <p:spPr/>
+        <p:txBody>
+          <a:bodyPr/>
+          <a:lstStyle/>
+          <a:p>
+            <a:r>
+              <a:t>Зафиксируйте ресурсы, срок и условия остановки. Пилот запускается по отдельному решению владельца кейса.</a:t>
+            </a:r>
+          </a:p>
+        </p:txBody>
+      </p:sp>
+      <p:sp>
+        <p:nvSpPr>
+          <p:cNvPr id="4" name="Slide Number Placeholder 3"/>
+          <p:cNvSpPr>
+            <a:spLocks noGrp="1"/>
+          </p:cNvSpPr>
+          <p:nvPr>
+            <p:ph type="sldNum" idx="5"/>
+          </p:nvPr>
+        </p:nvSpPr>
+        <p:spPr/>
+        <p:txBody>
+          <a:bodyPr/>
+          <a:lstStyle/>
+          <a:p>
+            <a:endParaRPr/>
+          </a:p>
+        </p:txBody>
+      </p:sp>
+    </p:spTree>
+  </p:cSld>
+  <p:clrMapOvr>
+    <a:masterClrMapping/>
+  </p:clrMapOvr>
+</p:notes>
+</file>
+
+<file path=ppt/notesSlides/notesSlide11.xml><?xml version="1.0" encoding="utf-8"?>
 <p:notes xmlns:a="http://schemas.openxmlformats.org/drawingml/2006/main" xmlns:r="http://schemas.openxmlformats.org/officeDocument/2006/relationships" xmlns:p="http://schemas.openxmlformats.org/presentationml/2006/main">
   <p:cSld>
     <p:spTree>
@@ -3122,6 +3205,881 @@
     <p:extLst>
       <p:ext uri="{BB962C8B-B14F-4D97-AF65-F5344CB8AC3E}">
         <p14:creationId xmlns:p14="http://schemas.microsoft.com/office/powerpoint/2010/main" val="1937686222"/>
+      </p:ext>
+    </p:extLst>
+  </p:cSld>
+  <p:clrMapOvr>
+    <a:masterClrMapping/>
+  </p:clrMapOvr>
+</p:sld>
+</file>
+
+<file path=ppt/slides/slide11.xml><?xml version="1.0" encoding="utf-8"?>
+<p:sld xmlns:a="http://schemas.openxmlformats.org/drawingml/2006/main" xmlns:r="http://schemas.openxmlformats.org/officeDocument/2006/relationships" xmlns:p="http://schemas.openxmlformats.org/presentationml/2006/main">
+  <p:cSld>
+    <p:bg>
+      <p:bgPr>
+        <a:solidFill>
+          <a:srgbClr val="052849"/>
+        </a:solidFill>
+        <a:effectLst/>
+      </p:bgPr>
+    </p:bg>
+    <p:spTree>
+      <p:nvGrpSpPr>
+        <p:cNvPr id="1" name=""/>
+        <p:cNvGrpSpPr/>
+        <p:nvPr/>
+      </p:nvGrpSpPr>
+      <p:grpSpPr>
+        <a:xfrm>
+          <a:off x="0" y="0"/>
+          <a:ext cx="0" cy="0"/>
+          <a:chOff x="0" y="0"/>
+          <a:chExt cx="0" cy="0"/>
+        </a:xfrm>
+      </p:grpSpPr>
+      <p:sp>
+        <p:nvSpPr>
+          <p:cNvPr id="18" name="Прямоугольник 17">
+            <a:extLst>
+              <a:ext uri="{FF2B5EF4-FFF2-40B4-BE49-F238E27FC236}">
+                <a16:creationId xmlns:a16="http://schemas.microsoft.com/office/drawing/2014/main" id="{192ECB55-29B1-444A-B441-0ADFC8C279BF}"/>
+              </a:ext>
+            </a:extLst>
+          </p:cNvPr>
+          <p:cNvSpPr>
+            <a:spLocks noGrp="1"/>
+          </p:cNvSpPr>
+          <p:nvPr/>
+        </p:nvSpPr>
+        <p:spPr>
+          <a:xfrm>
+            <a:off x="609600" y="438150"/>
+            <a:ext cx="10858500" cy="1190625"/>
+          </a:xfrm>
+          <a:prstGeom prst="rect">
+            <a:avLst/>
+          </a:prstGeom>
+          <a:noFill/>
+          <a:ln w="0">
+            <a:noFill/>
+          </a:ln>
+        </p:spPr>
+        <p:txBody>
+          <a:bodyPr>
+            <a:noAutofit/>
+          </a:bodyPr>
+          <a:lstStyle/>
+          <a:p>
+            <a:pPr>
+              <a:defRPr sz="3600" b="1">
+                <a:solidFill>
+                  <a:srgbClr val="19AAB8"/>
+                </a:solidFill>
+                <a:latin typeface="Arial"/>
+                <a:ea typeface="Arial"/>
+                <a:cs typeface="Arial"/>
+              </a:defRPr>
+            </a:pPr>
+            <a:r>
+              <a:rPr sz="3600" b="1">
+                <a:solidFill>
+                  <a:srgbClr val="19AAB8"/>
+                </a:solidFill>
+                <a:latin typeface="Arial"/>
+                <a:ea typeface="Arial"/>
+                <a:cs typeface="Arial"/>
+              </a:rPr>
+              <a:t>Пилот: сроки, бюджет и условия</a:t>
+            </a:r>
+          </a:p>
+        </p:txBody>
+      </p:sp>
+      <p:sp>
+        <p:nvSpPr>
+          <p:cNvPr id="2" name="Прямоугольник 1">
+            <a:extLst>
+              <a:ext uri="{FF2B5EF4-FFF2-40B4-BE49-F238E27FC236}">
+                <a16:creationId xmlns:a16="http://schemas.microsoft.com/office/drawing/2014/main" id="{CEFB3606-C2EB-4612-8146-1768DD1389CF}"/>
+              </a:ext>
+            </a:extLst>
+          </p:cNvPr>
+          <p:cNvSpPr>
+            <a:spLocks noGrp="1"/>
+          </p:cNvSpPr>
+          <p:nvPr/>
+        </p:nvSpPr>
+        <p:spPr>
+          <a:xfrm>
+            <a:off x="0" y="5953125"/>
+            <a:ext cx="12192000" cy="904875"/>
+          </a:xfrm>
+          <a:prstGeom prst="rect">
+            <a:avLst/>
+          </a:prstGeom>
+          <a:solidFill>
+            <a:srgbClr val="FFFFFF"/>
+          </a:solidFill>
+          <a:ln w="0">
+            <a:noFill/>
+          </a:ln>
+        </p:spPr>
+      </p:sp>
+      <p:pic>
+        <p:nvPicPr>
+          <p:cNvPr id="20" name="Рисунок 19"/>
+          <p:cNvPicPr>
+            <a:picLocks noChangeAspect="1"/>
+          </p:cNvPicPr>
+          <p:nvPr/>
+        </p:nvPicPr>
+        <p:blipFill>
+          <a:blip r:embed="rId3"/>
+          <a:stretch/>
+        </p:blipFill>
+        <p:spPr>
+          <a:xfrm>
+            <a:off x="609600" y="6143625"/>
+            <a:ext cx="457200" cy="457200"/>
+          </a:xfrm>
+          <a:prstGeom prst="rect">
+            <a:avLst/>
+          </a:prstGeom>
+        </p:spPr>
+      </p:pic>
+      <p:sp>
+        <p:nvSpPr>
+          <p:cNvPr id="4" name="Прямоугольник 3">
+            <a:extLst>
+              <a:ext uri="{FF2B5EF4-FFF2-40B4-BE49-F238E27FC236}">
+                <a16:creationId xmlns:a16="http://schemas.microsoft.com/office/drawing/2014/main" id="{F5E5AB75-F08B-4814-8423-FA43A647EA56}"/>
+              </a:ext>
+            </a:extLst>
+          </p:cNvPr>
+          <p:cNvSpPr>
+            <a:spLocks noGrp="1"/>
+          </p:cNvSpPr>
+          <p:nvPr/>
+        </p:nvSpPr>
+        <p:spPr>
+          <a:xfrm>
+            <a:off x="1143000" y="6134100"/>
+            <a:ext cx="1619250" cy="514350"/>
+          </a:xfrm>
+          <a:prstGeom prst="rect">
+            <a:avLst/>
+          </a:prstGeom>
+          <a:noFill/>
+          <a:ln w="0">
+            <a:noFill/>
+          </a:ln>
+        </p:spPr>
+        <p:txBody>
+          <a:bodyPr>
+            <a:noAutofit/>
+          </a:bodyPr>
+          <a:lstStyle/>
+          <a:p>
+            <a:pPr>
+              <a:defRPr sz="3000" b="1">
+                <a:solidFill>
+                  <a:srgbClr val="052849"/>
+                </a:solidFill>
+                <a:latin typeface="Arial"/>
+                <a:ea typeface="Arial"/>
+                <a:cs typeface="Arial"/>
+              </a:defRPr>
+            </a:pPr>
+            <a:r>
+              <a:rPr sz="3000" b="1">
+                <a:solidFill>
+                  <a:srgbClr val="052849"/>
+                </a:solidFill>
+                <a:latin typeface="Arial"/>
+                <a:ea typeface="Arial"/>
+                <a:cs typeface="Arial"/>
+              </a:rPr>
+              <a:t>окели</a:t>
+            </a:r>
+          </a:p>
+        </p:txBody>
+      </p:sp>
+      <p:pic>
+        <p:nvPicPr>
+          <p:cNvPr id="22" name="Рисунок 21"/>
+          <p:cNvPicPr>
+            <a:picLocks noChangeAspect="1"/>
+          </p:cNvPicPr>
+          <p:nvPr/>
+        </p:nvPicPr>
+        <p:blipFill>
+          <a:blip r:embed="rId4"/>
+          <a:stretch/>
+        </p:blipFill>
+        <p:spPr>
+          <a:xfrm>
+            <a:off x="4762500" y="6115159"/>
+            <a:ext cx="1390650" cy="590333"/>
+          </a:xfrm>
+          <a:prstGeom prst="rect">
+            <a:avLst/>
+          </a:prstGeom>
+        </p:spPr>
+      </p:pic>
+      <p:pic>
+        <p:nvPicPr>
+          <p:cNvPr id="23" name="Рисунок 22"/>
+          <p:cNvPicPr>
+            <a:picLocks noChangeAspect="1"/>
+          </p:cNvPicPr>
+          <p:nvPr/>
+        </p:nvPicPr>
+        <p:blipFill>
+          <a:blip r:embed="rId5"/>
+          <a:stretch/>
+        </p:blipFill>
+        <p:spPr>
+          <a:xfrm>
+            <a:off x="9039225" y="6067425"/>
+            <a:ext cx="628650" cy="628650"/>
+          </a:xfrm>
+          <a:prstGeom prst="rect">
+            <a:avLst/>
+          </a:prstGeom>
+        </p:spPr>
+      </p:pic>
+      <p:sp>
+        <p:nvSpPr>
+          <p:cNvPr id="7" name="Прямоугольник 6">
+            <a:extLst>
+              <a:ext uri="{FF2B5EF4-FFF2-40B4-BE49-F238E27FC236}">
+                <a16:creationId xmlns:a16="http://schemas.microsoft.com/office/drawing/2014/main" id="{1CBB27BF-99A4-453E-851E-467B7686C5CF}"/>
+              </a:ext>
+            </a:extLst>
+          </p:cNvPr>
+          <p:cNvSpPr>
+            <a:spLocks noGrp="1"/>
+          </p:cNvSpPr>
+          <p:nvPr/>
+        </p:nvSpPr>
+        <p:spPr>
+          <a:xfrm>
+            <a:off x="9829800" y="6305550"/>
+            <a:ext cx="1571625" cy="257175"/>
+          </a:xfrm>
+          <a:prstGeom prst="rect">
+            <a:avLst/>
+          </a:prstGeom>
+          <a:noFill/>
+          <a:ln w="0">
+            <a:noFill/>
+          </a:ln>
+        </p:spPr>
+        <p:txBody>
+          <a:bodyPr>
+            <a:noAutofit/>
+          </a:bodyPr>
+          <a:lstStyle/>
+          <a:p>
+            <a:pPr>
+              <a:defRPr sz="1575" b="0">
+                <a:solidFill>
+                  <a:srgbClr val="052849"/>
+                </a:solidFill>
+                <a:latin typeface="Arial"/>
+                <a:ea typeface="Arial"/>
+                <a:cs typeface="Arial"/>
+              </a:defRPr>
+            </a:pPr>
+            <a:r>
+              <a:rPr sz="1575" b="0">
+                <a:solidFill>
+                  <a:srgbClr val="052849"/>
+                </a:solidFill>
+                <a:latin typeface="Arial"/>
+                <a:ea typeface="Arial"/>
+                <a:cs typeface="Arial"/>
+              </a:rPr>
+              <a:t>Волгоград</a:t>
+            </a:r>
+          </a:p>
+        </p:txBody>
+      </p:sp>
+      <p:sp>
+        <p:nvSpPr>
+          <p:cNvPr id="8" name="Прямоугольник 7">
+            <a:extLst>
+              <a:ext uri="{FF2B5EF4-FFF2-40B4-BE49-F238E27FC236}">
+                <a16:creationId xmlns:a16="http://schemas.microsoft.com/office/drawing/2014/main" id="{86CB9FD8-65D1-4A08-B381-6FC1FF4F5F20}"/>
+              </a:ext>
+            </a:extLst>
+          </p:cNvPr>
+          <p:cNvSpPr>
+            <a:spLocks noGrp="1"/>
+          </p:cNvSpPr>
+          <p:nvPr/>
+        </p:nvSpPr>
+        <p:spPr>
+          <a:xfrm>
+            <a:off x="11525250" y="6343650"/>
+            <a:ext cx="419100" cy="209550"/>
+          </a:xfrm>
+          <a:prstGeom prst="rect">
+            <a:avLst/>
+          </a:prstGeom>
+          <a:noFill/>
+          <a:ln w="0">
+            <a:noFill/>
+          </a:ln>
+        </p:spPr>
+        <p:txBody>
+          <a:bodyPr>
+            <a:noAutofit/>
+          </a:bodyPr>
+          <a:lstStyle/>
+          <a:p>
+            <a:pPr>
+              <a:defRPr sz="1050" b="0">
+                <a:solidFill>
+                  <a:srgbClr val="566572"/>
+                </a:solidFill>
+                <a:latin typeface="Arial"/>
+                <a:ea typeface="Arial"/>
+                <a:cs typeface="Arial"/>
+              </a:defRPr>
+            </a:pPr>
+            <a:r>
+              <a:rPr sz="1050" b="0">
+                <a:solidFill>
+                  <a:srgbClr val="566572"/>
+                </a:solidFill>
+                <a:latin typeface="Arial"/>
+                <a:ea typeface="Arial"/>
+                <a:cs typeface="Arial"/>
+              </a:rPr>
+              <a:t>11</a:t>
+            </a:r>
+          </a:p>
+        </p:txBody>
+      </p:sp>
+      <p:sp>
+        <p:nvSpPr>
+          <p:cNvPr id="9" name="Прямоугольник 8">
+            <a:extLst>
+              <a:ext uri="{FF2B5EF4-FFF2-40B4-BE49-F238E27FC236}">
+                <a16:creationId xmlns:a16="http://schemas.microsoft.com/office/drawing/2014/main" id="{A3FD01D5-FC46-4CAE-83B0-1BD9BC11DC6F}"/>
+              </a:ext>
+            </a:extLst>
+          </p:cNvPr>
+          <p:cNvSpPr>
+            <a:spLocks noGrp="1"/>
+          </p:cNvSpPr>
+          <p:nvPr/>
+        </p:nvSpPr>
+        <p:spPr>
+          <a:xfrm>
+            <a:off x="609600" y="1828800"/>
+            <a:ext cx="666750" cy="438150"/>
+          </a:xfrm>
+          <a:prstGeom prst="rect">
+            <a:avLst/>
+          </a:prstGeom>
+          <a:noFill/>
+          <a:ln w="0">
+            <a:noFill/>
+          </a:ln>
+        </p:spPr>
+        <p:txBody>
+          <a:bodyPr>
+            <a:noAutofit/>
+          </a:bodyPr>
+          <a:lstStyle/>
+          <a:p>
+            <a:pPr>
+              <a:defRPr sz="2325" b="1">
+                <a:solidFill>
+                  <a:srgbClr val="19AAB8"/>
+                </a:solidFill>
+                <a:latin typeface="Arial"/>
+                <a:ea typeface="Arial"/>
+                <a:cs typeface="Arial"/>
+              </a:defRPr>
+            </a:pPr>
+            <a:r>
+              <a:rPr sz="2325" b="1">
+                <a:solidFill>
+                  <a:srgbClr val="19AAB8"/>
+                </a:solidFill>
+                <a:latin typeface="Arial"/>
+                <a:ea typeface="Arial"/>
+                <a:cs typeface="Arial"/>
+              </a:rPr>
+              <a:t>01</a:t>
+            </a:r>
+          </a:p>
+        </p:txBody>
+      </p:sp>
+      <p:sp>
+        <p:nvSpPr>
+          <p:cNvPr id="10" name="Прямоугольник 9">
+            <a:extLst>
+              <a:ext uri="{FF2B5EF4-FFF2-40B4-BE49-F238E27FC236}">
+                <a16:creationId xmlns:a16="http://schemas.microsoft.com/office/drawing/2014/main" id="{DA88B8BC-8640-4DFE-811E-BD57BB0F14CB}"/>
+              </a:ext>
+            </a:extLst>
+          </p:cNvPr>
+          <p:cNvSpPr>
+            <a:spLocks noGrp="1"/>
+          </p:cNvSpPr>
+          <p:nvPr/>
+        </p:nvSpPr>
+        <p:spPr>
+          <a:xfrm>
+            <a:off x="1447800" y="1847850"/>
+            <a:ext cx="9858375" cy="609600"/>
+          </a:xfrm>
+          <a:prstGeom prst="rect">
+            <a:avLst/>
+          </a:prstGeom>
+          <a:noFill/>
+          <a:ln w="0">
+            <a:noFill/>
+          </a:ln>
+        </p:spPr>
+        <p:txBody>
+          <a:bodyPr>
+            <a:noAutofit/>
+          </a:bodyPr>
+          <a:lstStyle/>
+          <a:p>
+            <a:pPr>
+              <a:defRPr sz="2250" b="0">
+                <a:solidFill>
+                  <a:srgbClr val="FFFFFF"/>
+                </a:solidFill>
+                <a:latin typeface="Arial"/>
+                <a:ea typeface="Arial"/>
+                <a:cs typeface="Arial"/>
+              </a:defRPr>
+            </a:pPr>
+            <a:r>
+              <a:rPr sz="2250" b="0">
+                <a:solidFill>
+                  <a:srgbClr val="FFFFFF"/>
+                </a:solidFill>
+                <a:latin typeface="Arial"/>
+                <a:ea typeface="Arial"/>
+                <a:cs typeface="Arial"/>
+              </a:rPr>
+              <a:t>Сроки: разработка 01.10.2026 — 31.03.2027; пилот — 21.03 — 31.03.2027</a:t>
+            </a:r>
+          </a:p>
+        </p:txBody>
+      </p:sp>
+      <p:sp>
+        <p:nvSpPr>
+          <p:cNvPr id="11" name="Прямоугольник 10">
+            <a:extLst>
+              <a:ext uri="{FF2B5EF4-FFF2-40B4-BE49-F238E27FC236}">
+                <a16:creationId xmlns:a16="http://schemas.microsoft.com/office/drawing/2014/main" id="{000BD7E1-0A3F-4DB8-B29E-DA3AF33993DB}"/>
+              </a:ext>
+            </a:extLst>
+          </p:cNvPr>
+          <p:cNvSpPr>
+            <a:spLocks noGrp="1"/>
+          </p:cNvSpPr>
+          <p:nvPr/>
+        </p:nvSpPr>
+        <p:spPr>
+          <a:xfrm>
+            <a:off x="609600" y="2590800"/>
+            <a:ext cx="666750" cy="438150"/>
+          </a:xfrm>
+          <a:prstGeom prst="rect">
+            <a:avLst/>
+          </a:prstGeom>
+          <a:noFill/>
+          <a:ln w="0">
+            <a:noFill/>
+          </a:ln>
+        </p:spPr>
+        <p:txBody>
+          <a:bodyPr>
+            <a:noAutofit/>
+          </a:bodyPr>
+          <a:lstStyle/>
+          <a:p>
+            <a:pPr>
+              <a:defRPr sz="2325" b="1">
+                <a:solidFill>
+                  <a:srgbClr val="19AAB8"/>
+                </a:solidFill>
+                <a:latin typeface="Arial"/>
+                <a:ea typeface="Arial"/>
+                <a:cs typeface="Arial"/>
+              </a:defRPr>
+            </a:pPr>
+            <a:r>
+              <a:rPr sz="2325" b="1">
+                <a:solidFill>
+                  <a:srgbClr val="19AAB8"/>
+                </a:solidFill>
+                <a:latin typeface="Arial"/>
+                <a:ea typeface="Arial"/>
+                <a:cs typeface="Arial"/>
+              </a:rPr>
+              <a:t>02</a:t>
+            </a:r>
+          </a:p>
+        </p:txBody>
+      </p:sp>
+      <p:sp>
+        <p:nvSpPr>
+          <p:cNvPr id="12" name="Прямоугольник 11">
+            <a:extLst>
+              <a:ext uri="{FF2B5EF4-FFF2-40B4-BE49-F238E27FC236}">
+                <a16:creationId xmlns:a16="http://schemas.microsoft.com/office/drawing/2014/main" id="{7F5E34EA-7270-4ADD-A41B-EAB62178C983}"/>
+              </a:ext>
+            </a:extLst>
+          </p:cNvPr>
+          <p:cNvSpPr>
+            <a:spLocks noGrp="1"/>
+          </p:cNvSpPr>
+          <p:nvPr/>
+        </p:nvSpPr>
+        <p:spPr>
+          <a:xfrm>
+            <a:off x="1447800" y="2609850"/>
+            <a:ext cx="9858375" cy="609600"/>
+          </a:xfrm>
+          <a:prstGeom prst="rect">
+            <a:avLst/>
+          </a:prstGeom>
+          <a:noFill/>
+          <a:ln w="0">
+            <a:noFill/>
+          </a:ln>
+        </p:spPr>
+        <p:txBody>
+          <a:bodyPr>
+            <a:noAutofit/>
+          </a:bodyPr>
+          <a:lstStyle/>
+          <a:p>
+            <a:pPr>
+              <a:defRPr sz="2250" b="0">
+                <a:solidFill>
+                  <a:srgbClr val="FFFFFF"/>
+                </a:solidFill>
+                <a:latin typeface="Arial"/>
+                <a:ea typeface="Arial"/>
+                <a:cs typeface="Arial"/>
+              </a:defRPr>
+            </a:pPr>
+            <a:r>
+              <a:rPr sz="2250" b="0">
+                <a:solidFill>
+                  <a:srgbClr val="FFFFFF"/>
+                </a:solidFill>
+                <a:latin typeface="Arial"/>
+                <a:ea typeface="Arial"/>
+                <a:cs typeface="Arial"/>
+              </a:rPr>
+              <a:t>Бюджет: 5,0 млн ₽ с НДС 22%; труд 3,17 млн, инфраструктура 234 тыс.; средства заказчика 100%</a:t>
+            </a:r>
+          </a:p>
+        </p:txBody>
+      </p:sp>
+      <p:sp>
+        <p:nvSpPr>
+          <p:cNvPr id="13" name="Прямоугольник 12">
+            <a:extLst>
+              <a:ext uri="{FF2B5EF4-FFF2-40B4-BE49-F238E27FC236}">
+                <a16:creationId xmlns:a16="http://schemas.microsoft.com/office/drawing/2014/main" id="{C2360ED4-3717-40A6-9D43-22DDD79C932D}"/>
+              </a:ext>
+            </a:extLst>
+          </p:cNvPr>
+          <p:cNvSpPr>
+            <a:spLocks noGrp="1"/>
+          </p:cNvSpPr>
+          <p:nvPr/>
+        </p:nvSpPr>
+        <p:spPr>
+          <a:xfrm>
+            <a:off x="609600" y="3352800"/>
+            <a:ext cx="666750" cy="438150"/>
+          </a:xfrm>
+          <a:prstGeom prst="rect">
+            <a:avLst/>
+          </a:prstGeom>
+          <a:noFill/>
+          <a:ln w="0">
+            <a:noFill/>
+          </a:ln>
+        </p:spPr>
+        <p:txBody>
+          <a:bodyPr>
+            <a:noAutofit/>
+          </a:bodyPr>
+          <a:lstStyle/>
+          <a:p>
+            <a:pPr>
+              <a:defRPr sz="2325" b="1">
+                <a:solidFill>
+                  <a:srgbClr val="19AAB8"/>
+                </a:solidFill>
+                <a:latin typeface="Arial"/>
+                <a:ea typeface="Arial"/>
+                <a:cs typeface="Arial"/>
+              </a:defRPr>
+            </a:pPr>
+            <a:r>
+              <a:rPr sz="2325" b="1">
+                <a:solidFill>
+                  <a:srgbClr val="19AAB8"/>
+                </a:solidFill>
+                <a:latin typeface="Arial"/>
+                <a:ea typeface="Arial"/>
+                <a:cs typeface="Arial"/>
+              </a:rPr>
+              <a:t>03</a:t>
+            </a:r>
+          </a:p>
+        </p:txBody>
+      </p:sp>
+      <p:sp>
+        <p:nvSpPr>
+          <p:cNvPr id="14" name="Прямоугольник 13">
+            <a:extLst>
+              <a:ext uri="{FF2B5EF4-FFF2-40B4-BE49-F238E27FC236}">
+                <a16:creationId xmlns:a16="http://schemas.microsoft.com/office/drawing/2014/main" id="{52C5A53D-B5F4-436A-863E-1372C8BBF8FD}"/>
+              </a:ext>
+            </a:extLst>
+          </p:cNvPr>
+          <p:cNvSpPr>
+            <a:spLocks noGrp="1"/>
+          </p:cNvSpPr>
+          <p:nvPr/>
+        </p:nvSpPr>
+        <p:spPr>
+          <a:xfrm>
+            <a:off x="1447800" y="3371850"/>
+            <a:ext cx="9858375" cy="609600"/>
+          </a:xfrm>
+          <a:prstGeom prst="rect">
+            <a:avLst/>
+          </a:prstGeom>
+          <a:noFill/>
+          <a:ln w="0">
+            <a:noFill/>
+          </a:ln>
+        </p:spPr>
+        <p:txBody>
+          <a:bodyPr>
+            <a:noAutofit/>
+          </a:bodyPr>
+          <a:lstStyle/>
+          <a:p>
+            <a:pPr>
+              <a:defRPr sz="2250" b="0">
+                <a:solidFill>
+                  <a:srgbClr val="FFFFFF"/>
+                </a:solidFill>
+                <a:latin typeface="Arial"/>
+                <a:ea typeface="Arial"/>
+                <a:cs typeface="Arial"/>
+              </a:defRPr>
+            </a:pPr>
+            <a:r>
+              <a:rPr sz="2250" b="0">
+                <a:solidFill>
+                  <a:srgbClr val="FFFFFF"/>
+                </a:solidFill>
+                <a:latin typeface="Arial"/>
+                <a:ea typeface="Arial"/>
+                <a:cs typeface="Arial"/>
+              </a:rPr>
+              <a:t>Успех: ≥85% принятых карточек; 12/12 tests.json (сейчас 10/10 + 21/21 перефразов); 40 мин → 5 мин</a:t>
+            </a:r>
+          </a:p>
+        </p:txBody>
+      </p:sp>
+      <p:sp>
+        <p:nvSpPr>
+          <p:cNvPr id="15" name="Прямоугольник 14">
+            <a:extLst>
+              <a:ext uri="{FF2B5EF4-FFF2-40B4-BE49-F238E27FC236}">
+                <a16:creationId xmlns:a16="http://schemas.microsoft.com/office/drawing/2014/main" id="{83C41163-9FB4-4D63-892B-8A6D595ADED4}"/>
+              </a:ext>
+            </a:extLst>
+          </p:cNvPr>
+          <p:cNvSpPr>
+            <a:spLocks noGrp="1"/>
+          </p:cNvSpPr>
+          <p:nvPr/>
+        </p:nvSpPr>
+        <p:spPr>
+          <a:xfrm>
+            <a:off x="609600" y="4114800"/>
+            <a:ext cx="666750" cy="438150"/>
+          </a:xfrm>
+          <a:prstGeom prst="rect">
+            <a:avLst/>
+          </a:prstGeom>
+          <a:noFill/>
+          <a:ln w="0">
+            <a:noFill/>
+          </a:ln>
+        </p:spPr>
+        <p:txBody>
+          <a:bodyPr>
+            <a:noAutofit/>
+          </a:bodyPr>
+          <a:lstStyle/>
+          <a:p>
+            <a:pPr>
+              <a:defRPr sz="2325" b="1">
+                <a:solidFill>
+                  <a:srgbClr val="19AAB8"/>
+                </a:solidFill>
+                <a:latin typeface="Arial"/>
+                <a:ea typeface="Arial"/>
+                <a:cs typeface="Arial"/>
+              </a:defRPr>
+            </a:pPr>
+            <a:r>
+              <a:rPr sz="2325" b="1">
+                <a:solidFill>
+                  <a:srgbClr val="19AAB8"/>
+                </a:solidFill>
+                <a:latin typeface="Arial"/>
+                <a:ea typeface="Arial"/>
+                <a:cs typeface="Arial"/>
+              </a:rPr>
+              <a:t>04</a:t>
+            </a:r>
+          </a:p>
+        </p:txBody>
+      </p:sp>
+      <p:sp>
+        <p:nvSpPr>
+          <p:cNvPr id="16" name="Прямоугольник 15">
+            <a:extLst>
+              <a:ext uri="{FF2B5EF4-FFF2-40B4-BE49-F238E27FC236}">
+                <a16:creationId xmlns:a16="http://schemas.microsoft.com/office/drawing/2014/main" id="{77F94E88-281D-4C78-BCA1-040D63FFCD6A}"/>
+              </a:ext>
+            </a:extLst>
+          </p:cNvPr>
+          <p:cNvSpPr>
+            <a:spLocks noGrp="1"/>
+          </p:cNvSpPr>
+          <p:nvPr/>
+        </p:nvSpPr>
+        <p:spPr>
+          <a:xfrm>
+            <a:off x="1447800" y="4133850"/>
+            <a:ext cx="9858375" cy="609600"/>
+          </a:xfrm>
+          <a:prstGeom prst="rect">
+            <a:avLst/>
+          </a:prstGeom>
+          <a:noFill/>
+          <a:ln w="0">
+            <a:noFill/>
+          </a:ln>
+        </p:spPr>
+        <p:txBody>
+          <a:bodyPr>
+            <a:noAutofit/>
+          </a:bodyPr>
+          <a:lstStyle/>
+          <a:p>
+            <a:pPr>
+              <a:defRPr sz="2250" b="0">
+                <a:solidFill>
+                  <a:srgbClr val="FFFFFF"/>
+                </a:solidFill>
+                <a:latin typeface="Arial"/>
+                <a:ea typeface="Arial"/>
+                <a:cs typeface="Arial"/>
+              </a:defRPr>
+            </a:pPr>
+            <a:r>
+              <a:rPr sz="2250" b="0">
+                <a:solidFill>
+                  <a:srgbClr val="FFFFFF"/>
+                </a:solidFill>
+                <a:latin typeface="Arial"/>
+                <a:ea typeface="Arial"/>
+                <a:cs typeface="Arial"/>
+              </a:rPr>
+              <a:t>От заказчика: представитель — владелец процесса, телефоны наставников, формат «только черновики»</a:t>
+            </a:r>
+          </a:p>
+        </p:txBody>
+      </p:sp>
+      <p:sp>
+        <p:nvSpPr>
+          <p:cNvPr id="17" name="Прямоугольник 16">
+            <a:extLst>
+              <a:ext uri="{FF2B5EF4-FFF2-40B4-BE49-F238E27FC236}">
+                <a16:creationId xmlns:a16="http://schemas.microsoft.com/office/drawing/2014/main" id="{E2F495F6-675F-4C5E-BD93-6FEA1BF5E673}"/>
+              </a:ext>
+            </a:extLst>
+          </p:cNvPr>
+          <p:cNvSpPr>
+            <a:spLocks noGrp="1"/>
+          </p:cNvSpPr>
+          <p:nvPr/>
+        </p:nvSpPr>
+        <p:spPr>
+          <a:xfrm>
+            <a:off x="609600" y="5248275"/>
+            <a:ext cx="10763250" cy="590550"/>
+          </a:xfrm>
+          <a:prstGeom prst="rect">
+            <a:avLst/>
+          </a:prstGeom>
+          <a:noFill/>
+          <a:ln w="0">
+            <a:noFill/>
+          </a:ln>
+        </p:spPr>
+        <p:txBody>
+          <a:bodyPr>
+            <a:noAutofit/>
+          </a:bodyPr>
+          <a:lstStyle/>
+          <a:p>
+            <a:pPr>
+              <a:defRPr sz="1350" b="0">
+                <a:solidFill>
+                  <a:srgbClr val="D4E5EA"/>
+                </a:solidFill>
+                <a:latin typeface="Arial"/>
+                <a:ea typeface="Arial"/>
+                <a:cs typeface="Arial"/>
+              </a:defRPr>
+            </a:pPr>
+            <a:r>
+              <a:rPr sz="1350" b="0">
+                <a:solidFill>
+                  <a:srgbClr val="D4E5EA"/>
+                </a:solidFill>
+                <a:latin typeface="Arial"/>
+                <a:ea typeface="Arial"/>
+                <a:cs typeface="Arial"/>
+              </a:rPr>
+              <a:t>Детали: план-график UPRSII_LR_6 и docs/pilot-proposal.md; числа эффекта — гипотеза, пилот подтвердит их замерами.</a:t>
+            </a:r>
+          </a:p>
+        </p:txBody>
+      </p:sp>
+    </p:spTree>
+    <p:extLst>
+      <p:ext uri="{BB962C8B-B14F-4D97-AF65-F5344CB8AC3E}">
+        <p14:creationId xmlns:p14="http://schemas.microsoft.com/office/powerpoint/2010/main" val="3199309508"/>
       </p:ext>
     </p:extLst>
   </p:cSld>

--- a/Презентация_команды_Finik_FB01.pptx
+++ b/Презентация_команды_Finik_FB01.pptx
@@ -1077,7 +1077,7 @@
           <a:lstStyle/>
           <a:p>
             <a:r>
-              <a:t>[слайд 17] Вот таблица проверок по каждому тесту: вход, ожидание, фактическая выдача. Два теста — пустой объект и повторная загрузка — ждут сборки полного контура, они в плане, мы это не скрываем.</a:t>
+              <a:t>[слайд 17] Вот таблица проверок по каждому из 12 тестов: вход, ожидание, фактическая выдача, пройдено. Все двенадцать зелёные, включая пустой объект и повторную загрузку.</a:t>
             </a:r>
           </a:p>
         </p:txBody>
@@ -1561,7 +1561,7 @@
           <a:lstStyle/>
           <a:p>
             <a:r>
-              <a:t>[1:40] Демонстрация. Показываем: событие регистрации → уточняющий диалог → извлечённая карточка → черновик наставнику. Если живое не идёт — сразу резервное видео, без пауз.</a:t>
+              <a:t>[1:40] Демонстрация (bot_fullstack). Показываем: вход клиента → уточняющий диалог → извлечённая карточка с цитатой → черновик наставнику. Если живое не идёт — сразу резервное видео, без пауз.</a:t>
             </a:r>
           </a:p>
         </p:txBody>
@@ -1638,7 +1638,7 @@
           <a:lstStyle/>
           <a:p>
             <a:r>
-              <a:t>[2:05] Красивое демо ничего не стоит без проверки. В контуре 12 автотестов; на локальной модели 10 из 10 сценариев прошли, плюс 21 перефраз — карточка собирается верно при разных формулировках ответа.</a:t>
+              <a:t>[2:05] Красивое демо ничего не стоит без проверки. Собрали полный контур (aiogram+движок правил): 172 проверки, все прошли. Двенадцать тестов кейса закрыты. Линия LLM отдельно: qwen2.5 локально — 10/10 кейсов и 21/21 перефраз.</a:t>
             </a:r>
           </a:p>
         </p:txBody>
@@ -6730,7 +6730,7 @@
                 <a:ea typeface="Arial"/>
                 <a:cs typeface="Arial"/>
               </a:rPr>
-              <a:t>Текущий результат: 10/10 базовых кейсов F001–F010 и 21/21 перефразированных входов (qwen2.5:7b, t=0.3, дважды подряд)</a:t>
+              <a:t>Текущий результат: контур собран — 172/172 проверок, 12/12 тестов; LLM-бейзлайн qwen2.5:7b — 10/10 кейсов, 21/21 перефраз</a:t>
             </a:r>
           </a:p>
         </p:txBody>
@@ -6844,7 +6844,7 @@
                 <a:ea typeface="Arial"/>
                 <a:cs typeface="Arial"/>
               </a:rPr>
-              <a:t>Краевые случаи: отказ от контакта F006, вопрос вне базы F007, обещание дохода F008, «вылечит» F009 — пройдены, с предупреждениями</a:t>
+              <a:t>Краевые случаи: отказ F006, вопрос вне базы F007, доход F008, «вылечит» F009 — пройдены с предупреждениями</a:t>
             </a:r>
           </a:p>
         </p:txBody>
@@ -6901,7 +6901,7 @@
                 <a:ea typeface="Arial"/>
                 <a:cs typeface="Arial"/>
               </a:rPr>
-              <a:t>Таблица проверок (вход / ожидание / результат / пройдено) — в репозитории: _baseline_qwen25_7b_t03.txt; F011–F012 — на собранном контуре</a:t>
+              <a:t>Таблица проверок — в репозитории: bot_fullstack/results/FB01_Проверки.md (прогон 24.09, 22:31)</a:t>
             </a:r>
           </a:p>
         </p:txBody>
@@ -10491,7 +10491,7 @@
                     <a:p>
                       <a:r>
                         <a:rPr sz="900"/>
-                        <a:t>проверяется на собранном контуре</a:t>
+                        <a:t>карточка не создана и не изменена; некорректный вход отмечен</a:t>
                       </a:r>
                     </a:p>
                   </a:txBody>
@@ -10504,7 +10504,7 @@
                     <a:p>
                       <a:r>
                         <a:rPr sz="900"/>
-                        <a:t>⏳ план</a:t>
+                        <a:t>Да ✅</a:t>
                       </a:r>
                     </a:p>
                   </a:txBody>
@@ -10563,7 +10563,7 @@
                     <a:p>
                       <a:r>
                         <a:rPr sz="900"/>
-                        <a:t>проверяется на собранном контуре</a:t>
+                        <a:t>обновлено 10 карточек, дублей нет (было 10, стало 10)</a:t>
                       </a:r>
                     </a:p>
                   </a:txBody>
@@ -10576,7 +10576,7 @@
                     <a:p>
                       <a:r>
                         <a:rPr sz="900"/>
-                        <a:t>⏳ план</a:t>
+                        <a:t>Да ✅</a:t>
                       </a:r>
                     </a:p>
                   </a:txBody>
